--- a/2 am/2 الأشطال و الصور/cours 6/عرض الدرس.pptx
+++ b/2 am/2 الأشطال و الصور/cours 6/عرض الدرس.pptx
@@ -204,7 +204,7 @@
           <a:p>
             <a:fld id="{04809ED0-CAD5-44E1-91E8-3616676F7223}" type="datetimeFigureOut">
               <a:rPr lang="fr-FR" smtClean="0"/>
-              <a:t>18/01/2025</a:t>
+              <a:t>19/01/2025</a:t>
             </a:fld>
             <a:endParaRPr lang="fr-FR"/>
           </a:p>
@@ -855,7 +855,7 @@
           <a:p>
             <a:fld id="{16B4F739-B7D4-4EFD-BF14-44542778AB9F}" type="datetimeFigureOut">
               <a:rPr lang="fr-FR" smtClean="0"/>
-              <a:t>18/01/2025</a:t>
+              <a:t>19/01/2025</a:t>
             </a:fld>
             <a:endParaRPr lang="fr-FR"/>
           </a:p>
@@ -1025,7 +1025,7 @@
           <a:p>
             <a:fld id="{16B4F739-B7D4-4EFD-BF14-44542778AB9F}" type="datetimeFigureOut">
               <a:rPr lang="fr-FR" smtClean="0"/>
-              <a:t>18/01/2025</a:t>
+              <a:t>19/01/2025</a:t>
             </a:fld>
             <a:endParaRPr lang="fr-FR"/>
           </a:p>
@@ -1205,7 +1205,7 @@
           <a:p>
             <a:fld id="{16B4F739-B7D4-4EFD-BF14-44542778AB9F}" type="datetimeFigureOut">
               <a:rPr lang="fr-FR" smtClean="0"/>
-              <a:t>18/01/2025</a:t>
+              <a:t>19/01/2025</a:t>
             </a:fld>
             <a:endParaRPr lang="fr-FR"/>
           </a:p>
@@ -1375,7 +1375,7 @@
           <a:p>
             <a:fld id="{16B4F739-B7D4-4EFD-BF14-44542778AB9F}" type="datetimeFigureOut">
               <a:rPr lang="fr-FR" smtClean="0"/>
-              <a:t>18/01/2025</a:t>
+              <a:t>19/01/2025</a:t>
             </a:fld>
             <a:endParaRPr lang="fr-FR"/>
           </a:p>
@@ -1621,7 +1621,7 @@
           <a:p>
             <a:fld id="{16B4F739-B7D4-4EFD-BF14-44542778AB9F}" type="datetimeFigureOut">
               <a:rPr lang="fr-FR" smtClean="0"/>
-              <a:t>18/01/2025</a:t>
+              <a:t>19/01/2025</a:t>
             </a:fld>
             <a:endParaRPr lang="fr-FR"/>
           </a:p>
@@ -1853,7 +1853,7 @@
           <a:p>
             <a:fld id="{16B4F739-B7D4-4EFD-BF14-44542778AB9F}" type="datetimeFigureOut">
               <a:rPr lang="fr-FR" smtClean="0"/>
-              <a:t>18/01/2025</a:t>
+              <a:t>19/01/2025</a:t>
             </a:fld>
             <a:endParaRPr lang="fr-FR"/>
           </a:p>
@@ -2220,7 +2220,7 @@
           <a:p>
             <a:fld id="{16B4F739-B7D4-4EFD-BF14-44542778AB9F}" type="datetimeFigureOut">
               <a:rPr lang="fr-FR" smtClean="0"/>
-              <a:t>18/01/2025</a:t>
+              <a:t>19/01/2025</a:t>
             </a:fld>
             <a:endParaRPr lang="fr-FR"/>
           </a:p>
@@ -2338,7 +2338,7 @@
           <a:p>
             <a:fld id="{16B4F739-B7D4-4EFD-BF14-44542778AB9F}" type="datetimeFigureOut">
               <a:rPr lang="fr-FR" smtClean="0"/>
-              <a:t>18/01/2025</a:t>
+              <a:t>19/01/2025</a:t>
             </a:fld>
             <a:endParaRPr lang="fr-FR"/>
           </a:p>
@@ -2433,7 +2433,7 @@
           <a:p>
             <a:fld id="{16B4F739-B7D4-4EFD-BF14-44542778AB9F}" type="datetimeFigureOut">
               <a:rPr lang="fr-FR" smtClean="0"/>
-              <a:t>18/01/2025</a:t>
+              <a:t>19/01/2025</a:t>
             </a:fld>
             <a:endParaRPr lang="fr-FR"/>
           </a:p>
@@ -2710,7 +2710,7 @@
           <a:p>
             <a:fld id="{16B4F739-B7D4-4EFD-BF14-44542778AB9F}" type="datetimeFigureOut">
               <a:rPr lang="fr-FR" smtClean="0"/>
-              <a:t>18/01/2025</a:t>
+              <a:t>19/01/2025</a:t>
             </a:fld>
             <a:endParaRPr lang="fr-FR"/>
           </a:p>
@@ -2963,7 +2963,7 @@
           <a:p>
             <a:fld id="{16B4F739-B7D4-4EFD-BF14-44542778AB9F}" type="datetimeFigureOut">
               <a:rPr lang="fr-FR" smtClean="0"/>
-              <a:t>18/01/2025</a:t>
+              <a:t>19/01/2025</a:t>
             </a:fld>
             <a:endParaRPr lang="fr-FR"/>
           </a:p>
@@ -3206,7 +3206,7 @@
           <a:p>
             <a:fld id="{16B4F739-B7D4-4EFD-BF14-44542778AB9F}" type="datetimeFigureOut">
               <a:rPr lang="fr-FR" smtClean="0"/>
-              <a:t>18/01/2025</a:t>
+              <a:t>19/01/2025</a:t>
             </a:fld>
             <a:endParaRPr lang="fr-FR"/>
           </a:p>
@@ -4955,10 +4955,32 @@
                 <a:ea typeface="Times New Roman" panose="02020603050405020304" pitchFamily="18" charset="0"/>
                 <a:cs typeface="Times New Roman" panose="02020603050405020304" pitchFamily="18" charset="0"/>
               </a:rPr>
-              <a:t>لإشكال</a:t>
+              <a:t>ل</a:t>
             </a:r>
             <a:r>
               <a:rPr lang="ar-DZ" sz="4400" b="1" u="sng" dirty="0">
+                <a:solidFill>
+                  <a:srgbClr val="FF0000"/>
+                </a:solidFill>
+                <a:latin typeface="Times New Roman" panose="02020603050405020304" pitchFamily="18" charset="0"/>
+                <a:ea typeface="Times New Roman" panose="02020603050405020304" pitchFamily="18" charset="0"/>
+                <a:cs typeface="Times New Roman" panose="02020603050405020304" pitchFamily="18" charset="0"/>
+              </a:rPr>
+              <a:t>أ</a:t>
+            </a:r>
+            <a:r>
+              <a:rPr lang="ar-SA" sz="4400" b="1" u="sng" dirty="0" smtClean="0">
+                <a:solidFill>
+                  <a:srgbClr val="FF0000"/>
+                </a:solidFill>
+                <a:latin typeface="Times New Roman" panose="02020603050405020304" pitchFamily="18" charset="0"/>
+                <a:ea typeface="Times New Roman" panose="02020603050405020304" pitchFamily="18" charset="0"/>
+                <a:cs typeface="Times New Roman" panose="02020603050405020304" pitchFamily="18" charset="0"/>
+              </a:rPr>
+              <a:t>شكال</a:t>
+            </a:r>
+            <a:r>
+              <a:rPr lang="ar-DZ" sz="4400" b="1" u="sng" dirty="0" smtClean="0">
                 <a:solidFill>
                   <a:srgbClr val="FF0000"/>
                 </a:solidFill>
@@ -5487,7 +5509,7 @@
           <p:nvPr/>
         </p:nvPicPr>
         <p:blipFill>
-          <a:blip r:embed="rId4"/>
+          <a:blip r:embed="rId3"/>
           <a:stretch>
             <a:fillRect/>
           </a:stretch>
@@ -5514,7 +5536,7 @@
           <p:nvPr/>
         </p:nvPicPr>
         <p:blipFill>
-          <a:blip r:embed="rId5"/>
+          <a:blip r:embed="rId4"/>
           <a:stretch>
             <a:fillRect/>
           </a:stretch>
@@ -5992,37 +6014,7 @@
                 <a:ea typeface="Times New Roman" panose="02020603050405020304" pitchFamily="18" charset="0"/>
                 <a:cs typeface="+mj-cs"/>
               </a:rPr>
-              <a:t>نضع </a:t>
-            </a:r>
-            <a:r>
-              <a:rPr kumimoji="0" lang="ar-DZ" sz="3200" b="1" i="0" u="none" strike="noStrike" cap="none" normalizeH="0" baseline="0" dirty="0" smtClean="0">
-                <a:ln>
-                  <a:noFill/>
-                </a:ln>
-                <a:solidFill>
-                  <a:schemeClr val="tx1"/>
-                </a:solidFill>
-                <a:effectLst/>
-                <a:latin typeface="Times New Roman" panose="02020603050405020304" pitchFamily="18" charset="0"/>
-                <a:ea typeface="Times New Roman" panose="02020603050405020304" pitchFamily="18" charset="0"/>
-                <a:cs typeface="+mj-cs"/>
-              </a:rPr>
-              <a:t>المشيرة داخل الشكل حتى يصبح شكلها        ، نضغط </a:t>
-            </a:r>
-            <a:r>
-              <a:rPr kumimoji="0" lang="ar-DZ" sz="3200" b="1" i="0" u="none" strike="noStrike" cap="none" normalizeH="0" baseline="0" dirty="0" smtClean="0">
-                <a:ln>
-                  <a:noFill/>
-                </a:ln>
-                <a:solidFill>
-                  <a:schemeClr val="tx1"/>
-                </a:solidFill>
-                <a:effectLst/>
-                <a:latin typeface="Times New Roman" panose="02020603050405020304" pitchFamily="18" charset="0"/>
-                <a:ea typeface="Times New Roman" panose="02020603050405020304" pitchFamily="18" charset="0"/>
-                <a:cs typeface="+mj-cs"/>
-              </a:rPr>
-              <a:t>و</a:t>
+              <a:t>نضع المشيرة داخل الشكل حتى يصبح شكلها        ، نضغط و</a:t>
             </a:r>
             <a:r>
               <a:rPr kumimoji="0" lang="ar-DZ" sz="3200" b="1" i="0" u="none" strike="noStrike" cap="none" normalizeH="0" dirty="0" smtClean="0">
@@ -6037,37 +6029,7 @@
                 <a:ea typeface="Times New Roman" panose="02020603050405020304" pitchFamily="18" charset="0"/>
                 <a:cs typeface="+mj-cs"/>
               </a:rPr>
-              <a:t> </a:t>
-            </a:r>
-            <a:r>
-              <a:rPr kumimoji="0" lang="ar-DZ" sz="3200" b="1" i="0" u="none" strike="noStrike" cap="none" normalizeH="0" dirty="0" smtClean="0">
-                <a:ln>
-                  <a:noFill/>
-                </a:ln>
-                <a:solidFill>
-                  <a:schemeClr val="tx1"/>
-                </a:solidFill>
-                <a:effectLst/>
-                <a:latin typeface="Times New Roman" panose="02020603050405020304" pitchFamily="18" charset="0"/>
-                <a:ea typeface="Times New Roman" panose="02020603050405020304" pitchFamily="18" charset="0"/>
-                <a:cs typeface="+mj-cs"/>
-              </a:rPr>
-              <a:t>دون رفع </a:t>
-            </a:r>
-            <a:r>
-              <a:rPr kumimoji="0" lang="ar-DZ" sz="3200" b="1" i="0" u="none" strike="noStrike" cap="none" normalizeH="0" dirty="0" smtClean="0">
-                <a:ln>
-                  <a:noFill/>
-                </a:ln>
-                <a:solidFill>
-                  <a:schemeClr val="tx1"/>
-                </a:solidFill>
-                <a:effectLst/>
-                <a:latin typeface="Times New Roman" panose="02020603050405020304" pitchFamily="18" charset="0"/>
-                <a:ea typeface="Times New Roman" panose="02020603050405020304" pitchFamily="18" charset="0"/>
-                <a:cs typeface="+mj-cs"/>
-              </a:rPr>
-              <a:t>اليد نسحب.</a:t>
+              <a:t> دون رفع اليد نسحب.</a:t>
             </a:r>
           </a:p>
           <a:p>
